--- a/research-materials/slides/04_輪講②_20261113_Kay2016_予測の不確かさの見せ方.pptx
+++ b/research-materials/slides/04_輪講②_20261113_Kay2016_予測の不確かさの見せ方.pptx
@@ -634,7 +634,7 @@
           <a:lstStyle/>
           <a:p>
             <a:r>
-              <a:t>ゆらぎアバターへの応用案です。予測の20点に、疲れ高めの境目の線を引くと、境目より右の点を数えるだけで、20人中7人が疲れ高めと読めます。さらに、5体のアバターを4点ずつに対応づけて、点の数と重なりの意味をそろえます。初回だけ30秒の説明も入れます。ただし本実験は11/2に開始済みでβ版を凍結しているので、これらは事後アンケートでの理解度の確認と、次の版で対応します。</a:t>
+              <a:t>ゆらぎアバターへの応用案です。予測の20点に、疲れ高めの境目の線を引くと、境目より右の点を数えるだけで、20人中7人が疲れ高めと読めます。さらに、5体のアバターを4点ずつに対応づけて、点の数と重なりの意味をそろえます。初回だけ30秒の説明も入れます。ただし本実験は11/2に開始済みでベータ版を凍結しているので、これらは事後アンケートでの理解度の確認と、次の版で対応します。</a:t>
             </a:r>
           </a:p>
         </p:txBody>
@@ -704,7 +704,7 @@
           <a:lstStyle/>
           <a:p>
             <a:r>
-              <a:t>本実験中はβ版を凍結しているので、画面は変えずに、事後アンケートに点の読み取り問題を2問追加することを提案します。画面の改良は修論の後の次の版で行い、ドットとアバターのどちらが行動に効くかを切り分ける実験につなげたいと考えています。</a:t>
+              <a:t>本実験中はベータ版を凍結しているので、画面は変えずに、事後アンケートに点の読み取り問題を2問追加することを提案します。画面の改良は修論の後の次の版で行い、ドットとアバターのどちらが行動に効くかを切り分ける実験につなげたいと考えています。</a:t>
             </a:r>
           </a:p>
         </p:txBody>
@@ -4036,7 +4036,7 @@
         <p:spPr>
           <a:xfrm>
             <a:off x="0" y="855796"/>
-            <a:ext cx="5115503" cy="300082"/>
+            <a:ext cx="6200000" cy="300082"/>
           </a:xfrm>
           <a:prstGeom prst="rect">
             <a:avLst/>
@@ -4489,6 +4489,9 @@
                 <a:solidFill>
                   <a:srgbClr val="24303F"/>
                 </a:solidFill>
+                <a:latin typeface="BIZ UDPゴシック"/>
+                <a:ea typeface="BIZ UDPゴシック"/>
+                <a:cs typeface="BIZ UDPゴシック"/>
               </a:rPr>
               <a:t>輪講 2026/11/13</a:t>
             </a:r>
@@ -4523,6 +4526,9 @@
                 <a:solidFill>
                   <a:srgbClr val="24303F"/>
                 </a:solidFill>
+                <a:latin typeface="BIZ UDPゴシック"/>
+                <a:ea typeface="BIZ UDPゴシック"/>
+                <a:cs typeface="BIZ UDPゴシック"/>
               </a:rPr>
               <a:t>今井元</a:t>
             </a:r>
@@ -4564,6 +4570,9 @@
                 <a:solidFill>
                   <a:srgbClr val="24303F"/>
                 </a:solidFill>
+                <a:latin typeface="BIZ UDPゴシック"/>
+                <a:ea typeface="BIZ UDPゴシック"/>
+                <a:cs typeface="BIZ UDPゴシック"/>
               </a:rPr>
               <a:t>メディアインタラクション研究室　輪講</a:t>
             </a:r>
@@ -4603,6 +4612,9 @@
                 <a:solidFill>
                   <a:srgbClr val="24303F"/>
                 </a:solidFill>
+                <a:latin typeface="BIZ UDPゴシック"/>
+                <a:ea typeface="BIZ UDPゴシック"/>
+                <a:cs typeface="BIZ UDPゴシック"/>
               </a:rPr>
               <a:t>大阪工業大学</a:t>
             </a:r>
@@ -4619,6 +4631,9 @@
                 <a:solidFill>
                   <a:srgbClr val="24303F"/>
                 </a:solidFill>
+                <a:latin typeface="BIZ UDPゴシック"/>
+                <a:ea typeface="BIZ UDPゴシック"/>
+                <a:cs typeface="BIZ UDPゴシック"/>
               </a:rPr>
               <a:t>メディアインタラクション研究室</a:t>
             </a:r>
@@ -4661,6 +4676,9 @@
                 <a:solidFill>
                   <a:srgbClr val="FFFFFF"/>
                 </a:solidFill>
+                <a:latin typeface="BIZ UDPゴシック"/>
+                <a:ea typeface="BIZ UDPゴシック"/>
+                <a:cs typeface="BIZ UDPゴシック"/>
               </a:rPr>
               <a:t>When(ish) is My Bus? User-centered Visualizations of Uncertainty in Everyday, Mobile Predictive Systems</a:t>
             </a:r>
@@ -4680,6 +4698,9 @@
                 <a:solidFill>
                   <a:srgbClr val="FFFFFF"/>
                 </a:solidFill>
+                <a:latin typeface="BIZ UDPゴシック"/>
+                <a:ea typeface="BIZ UDPゴシック"/>
+                <a:cs typeface="BIZ UDPゴシック"/>
               </a:rPr>
               <a:t>Kay, Kola, Hullman &amp; Munson, CHI 2016</a:t>
             </a:r>
@@ -4756,6 +4777,9 @@
                 <a:solidFill>
                   <a:srgbClr val="24303F"/>
                 </a:solidFill>
+                <a:latin typeface="BIZ UDPゴシック"/>
+                <a:ea typeface="BIZ UDPゴシック"/>
+                <a:cs typeface="BIZ UDPゴシック"/>
               </a:rPr>
               <a:t>ゆらぎアバターへの応用案</a:t>
             </a:r>
@@ -4774,9 +4798,14 @@
         </p:nvSpPr>
         <p:spPr/>
         <p:txBody>
-          <a:bodyPr/>
-          <a:p>
-            <a:r>
+          <a:bodyPr lIns="27432" rIns="0" wrap="none"/>
+          <a:p>
+            <a:r>
+              <a:rPr sz="900">
+                <a:latin typeface="BIZ UDPゴシック"/>
+                <a:ea typeface="BIZ UDPゴシック"/>
+                <a:cs typeface="BIZ UDPゴシック"/>
+              </a:rPr>
               <a:t>2026/11/13</a:t>
             </a:r>
           </a:p>
@@ -4797,7 +4826,11 @@
           <a:bodyPr/>
           <a:p>
             <a:fld id="{B6F15528-21DE-4FAA-801E-634DDDAF4B2B}" type="slidenum">
-              <a:rPr lang="en-US"/>
+              <a:rPr lang="en-US">
+                <a:latin typeface="BIZ UDPゴシック"/>
+                <a:ea typeface="BIZ UDPゴシック"/>
+                <a:cs typeface="BIZ UDPゴシック"/>
+              </a:rPr>
               <a:t>10</a:t>
             </a:fld>
           </a:p>
@@ -4836,6 +4869,9 @@
                 <a:solidFill>
                   <a:srgbClr val="0B3C6E"/>
                 </a:solidFill>
+                <a:latin typeface="BIZ UDPゴシック"/>
+                <a:ea typeface="BIZ UDPゴシック"/>
+                <a:cs typeface="BIZ UDPゴシック"/>
               </a:rPr>
               <a:t>6週間後の推し疲れの予測（提案どおり・20点）</a:t>
             </a:r>
@@ -5785,6 +5821,9 @@
                 <a:solidFill>
                   <a:srgbClr val="5A6676"/>
                 </a:solidFill>
+                <a:latin typeface="BIZ UDPゴシック"/>
+                <a:ea typeface="BIZ UDPゴシック"/>
+                <a:cs typeface="BIZ UDPゴシック"/>
               </a:rPr>
               <a:t>1.5</a:t>
             </a:r>
@@ -5859,6 +5898,9 @@
                 <a:solidFill>
                   <a:srgbClr val="5A6676"/>
                 </a:solidFill>
+                <a:latin typeface="BIZ UDPゴシック"/>
+                <a:ea typeface="BIZ UDPゴシック"/>
+                <a:cs typeface="BIZ UDPゴシック"/>
               </a:rPr>
               <a:t>2</a:t>
             </a:r>
@@ -5933,6 +5975,9 @@
                 <a:solidFill>
                   <a:srgbClr val="5A6676"/>
                 </a:solidFill>
+                <a:latin typeface="BIZ UDPゴシック"/>
+                <a:ea typeface="BIZ UDPゴシック"/>
+                <a:cs typeface="BIZ UDPゴシック"/>
               </a:rPr>
               <a:t>2.5</a:t>
             </a:r>
@@ -6007,6 +6052,9 @@
                 <a:solidFill>
                   <a:srgbClr val="5A6676"/>
                 </a:solidFill>
+                <a:latin typeface="BIZ UDPゴシック"/>
+                <a:ea typeface="BIZ UDPゴシック"/>
+                <a:cs typeface="BIZ UDPゴシック"/>
               </a:rPr>
               <a:t>3</a:t>
             </a:r>
@@ -6081,6 +6129,9 @@
                 <a:solidFill>
                   <a:srgbClr val="5A6676"/>
                 </a:solidFill>
+                <a:latin typeface="BIZ UDPゴシック"/>
+                <a:ea typeface="BIZ UDPゴシック"/>
+                <a:cs typeface="BIZ UDPゴシック"/>
               </a:rPr>
               <a:t>3.5</a:t>
             </a:r>
@@ -6155,6 +6206,9 @@
                 <a:solidFill>
                   <a:srgbClr val="5A6676"/>
                 </a:solidFill>
+                <a:latin typeface="BIZ UDPゴシック"/>
+                <a:ea typeface="BIZ UDPゴシック"/>
+                <a:cs typeface="BIZ UDPゴシック"/>
               </a:rPr>
               <a:t>4</a:t>
             </a:r>
@@ -6229,6 +6283,9 @@
                 <a:solidFill>
                   <a:srgbClr val="5A6676"/>
                 </a:solidFill>
+                <a:latin typeface="BIZ UDPゴシック"/>
+                <a:ea typeface="BIZ UDPゴシック"/>
+                <a:cs typeface="BIZ UDPゴシック"/>
               </a:rPr>
               <a:t>4.5</a:t>
             </a:r>
@@ -6303,6 +6360,9 @@
                 <a:solidFill>
                   <a:srgbClr val="5A6676"/>
                 </a:solidFill>
+                <a:latin typeface="BIZ UDPゴシック"/>
+                <a:ea typeface="BIZ UDPゴシック"/>
+                <a:cs typeface="BIZ UDPゴシック"/>
               </a:rPr>
               <a:t>5</a:t>
             </a:r>
@@ -6342,6 +6402,9 @@
                 <a:solidFill>
                   <a:srgbClr val="5A6676"/>
                 </a:solidFill>
+                <a:latin typeface="BIZ UDPゴシック"/>
+                <a:ea typeface="BIZ UDPゴシック"/>
+                <a:cs typeface="BIZ UDPゴシック"/>
               </a:rPr>
               <a:t>推し疲れ（5段階）</a:t>
             </a:r>
@@ -6439,6 +6502,9 @@
                 <a:solidFill>
                   <a:srgbClr val="FFFFFF"/>
                 </a:solidFill>
+                <a:latin typeface="BIZ UDPゴシック"/>
+                <a:ea typeface="BIZ UDPゴシック"/>
+                <a:cs typeface="BIZ UDPゴシック"/>
               </a:rPr>
               <a:t>疲れ高め 3.5〜</a:t>
             </a:r>
@@ -6478,6 +6544,9 @@
                 <a:solidFill>
                   <a:srgbClr val="E07A10"/>
                 </a:solidFill>
+                <a:latin typeface="BIZ UDPゴシック"/>
+                <a:ea typeface="BIZ UDPゴシック"/>
+                <a:cs typeface="BIZ UDPゴシック"/>
               </a:rPr>
               <a:t>→ 境目より右の点を数える：20人中7人</a:t>
             </a:r>
@@ -6541,6 +6610,9 @@
                 <a:solidFill>
                   <a:srgbClr val="24303F"/>
                 </a:solidFill>
+                <a:latin typeface="BIZ UDPゴシック"/>
+                <a:ea typeface="BIZ UDPゴシック"/>
+                <a:cs typeface="BIZ UDPゴシック"/>
               </a:rPr>
               <a:t>5体のアバター＝4点ずつ。点とアバターの意味をそろえる</a:t>
             </a:r>
@@ -6698,6 +6770,9 @@
                 <a:solidFill>
                   <a:srgbClr val="0B3C6E"/>
                 </a:solidFill>
+                <a:latin typeface="BIZ UDPゴシック"/>
+                <a:ea typeface="BIZ UDPゴシック"/>
+                <a:cs typeface="BIZ UDPゴシック"/>
               </a:rPr>
               <a:t>境目の線を引く</a:t>
             </a:r>
@@ -6737,6 +6812,9 @@
                 <a:solidFill>
                   <a:srgbClr val="24303F"/>
                 </a:solidFill>
+                <a:latin typeface="BIZ UDPゴシック"/>
+                <a:ea typeface="BIZ UDPゴシック"/>
+                <a:cs typeface="BIZ UDPゴシック"/>
               </a:rPr>
               <a:t>「疲れ高め」の点を数えやすくする</a:t>
             </a:r>
@@ -6894,6 +6972,9 @@
                 <a:solidFill>
                   <a:srgbClr val="0B3C6E"/>
                 </a:solidFill>
+                <a:latin typeface="BIZ UDPゴシック"/>
+                <a:ea typeface="BIZ UDPゴシック"/>
+                <a:cs typeface="BIZ UDPゴシック"/>
               </a:rPr>
               <a:t>1体＝4点に対応づけ</a:t>
             </a:r>
@@ -6933,6 +7014,9 @@
                 <a:solidFill>
                   <a:srgbClr val="24303F"/>
                 </a:solidFill>
+                <a:latin typeface="BIZ UDPゴシック"/>
+                <a:ea typeface="BIZ UDPゴシック"/>
+                <a:cs typeface="BIZ UDPゴシック"/>
               </a:rPr>
               <a:t>重なりの意味を点の数と一致させる</a:t>
             </a:r>
@@ -7090,6 +7174,9 @@
                 <a:solidFill>
                   <a:srgbClr val="0B3C6E"/>
                 </a:solidFill>
+                <a:latin typeface="BIZ UDPゴシック"/>
+                <a:ea typeface="BIZ UDPゴシック"/>
+                <a:cs typeface="BIZ UDPゴシック"/>
               </a:rPr>
               <a:t>初回だけ30秒の説明</a:t>
             </a:r>
@@ -7129,6 +7216,9 @@
                 <a:solidFill>
                   <a:srgbClr val="24303F"/>
                 </a:solidFill>
+                <a:latin typeface="BIZ UDPゴシック"/>
+                <a:ea typeface="BIZ UDPゴシック"/>
+                <a:cs typeface="BIZ UDPゴシック"/>
               </a:rPr>
               <a:t>「ぼやけ＝ありうる未来の数」と伝える</a:t>
             </a:r>
@@ -7192,6 +7282,9 @@
                 <a:solidFill>
                   <a:srgbClr val="E8457C"/>
                 </a:solidFill>
+                <a:latin typeface="BIZ UDPゴシック"/>
+                <a:ea typeface="BIZ UDPゴシック"/>
+                <a:cs typeface="BIZ UDPゴシック"/>
               </a:rPr>
               <a:t>※ 予測分布は例示</a:t>
             </a:r>
@@ -7244,6 +7337,9 @@
                 <a:solidFill>
                   <a:srgbClr val="24303F"/>
                 </a:solidFill>
+                <a:latin typeface="BIZ UDPゴシック"/>
+                <a:ea typeface="BIZ UDPゴシック"/>
+                <a:cs typeface="BIZ UDPゴシック"/>
               </a:rPr>
               <a:t>いまの実験でできること・次の版でやること</a:t>
             </a:r>
@@ -7262,9 +7358,14 @@
         </p:nvSpPr>
         <p:spPr/>
         <p:txBody>
-          <a:bodyPr/>
-          <a:p>
-            <a:r>
+          <a:bodyPr lIns="27432" rIns="0" wrap="none"/>
+          <a:p>
+            <a:r>
+              <a:rPr sz="900">
+                <a:latin typeface="BIZ UDPゴシック"/>
+                <a:ea typeface="BIZ UDPゴシック"/>
+                <a:cs typeface="BIZ UDPゴシック"/>
+              </a:rPr>
               <a:t>2026/11/13</a:t>
             </a:r>
           </a:p>
@@ -7285,7 +7386,11 @@
           <a:bodyPr/>
           <a:p>
             <a:fld id="{B6F15528-21DE-4FAA-801E-634DDDAF4B2B}" type="slidenum">
-              <a:rPr lang="en-US"/>
+              <a:rPr lang="en-US">
+                <a:latin typeface="BIZ UDPゴシック"/>
+                <a:ea typeface="BIZ UDPゴシック"/>
+                <a:cs typeface="BIZ UDPゴシック"/>
+              </a:rPr>
               <a:t>11</a:t>
             </a:fld>
           </a:p>
@@ -7434,8 +7539,11 @@
                 <a:solidFill>
                   <a:srgbClr val="12A38A"/>
                 </a:solidFill>
+                <a:latin typeface="BIZ UDPゴシック"/>
+                <a:ea typeface="BIZ UDPゴシック"/>
+                <a:cs typeface="BIZ UDPゴシック"/>
               </a:rPr>
-              <a:t>本実験中（β版は凍結）</a:t>
+              <a:t>本実験中（ベータ版は凍結）</a:t>
             </a:r>
           </a:p>
         </p:txBody>
@@ -7469,7 +7577,7 @@
               <a:buClr>
                 <a:srgbClr val="0099FF"/>
               </a:buClr>
-              <a:buFont typeface="Arial"/>
+              <a:buFont typeface="BIZ UDPゴシック"/>
               <a:buChar char="•"/>
             </a:pPr>
             <a:r>
@@ -7477,6 +7585,9 @@
                 <a:solidFill>
                   <a:srgbClr val="24303F"/>
                 </a:solidFill>
+                <a:latin typeface="BIZ UDPゴシック"/>
+                <a:ea typeface="BIZ UDPゴシック"/>
+                <a:cs typeface="BIZ UDPゴシック"/>
               </a:rPr>
               <a:t>事後アンケートに「点の読み取り」問題を2問追加（例：疲れ高めは何人？）</a:t>
             </a:r>
@@ -7489,7 +7600,7 @@
               <a:buClr>
                 <a:srgbClr val="0099FF"/>
               </a:buClr>
-              <a:buFont typeface="Arial"/>
+              <a:buFont typeface="BIZ UDPゴシック"/>
               <a:buChar char="•"/>
             </a:pPr>
             <a:r>
@@ -7497,6 +7608,9 @@
                 <a:solidFill>
                   <a:srgbClr val="24303F"/>
                 </a:solidFill>
+                <a:latin typeface="BIZ UDPゴシック"/>
+                <a:ea typeface="BIZ UDPゴシック"/>
+                <a:cs typeface="BIZ UDPゴシック"/>
               </a:rPr>
               <a:t>予測の理解度と、提案の実行率・予測への信頼との関係を探索的に分析</a:t>
             </a:r>
@@ -7509,7 +7623,7 @@
               <a:buClr>
                 <a:srgbClr val="E8457C"/>
               </a:buClr>
-              <a:buFont typeface="Arial"/>
+              <a:buFont typeface="BIZ UDPゴシック"/>
               <a:buChar char="•"/>
             </a:pPr>
             <a:r>
@@ -7517,6 +7631,9 @@
                 <a:solidFill>
                   <a:srgbClr val="24303F"/>
                 </a:solidFill>
+                <a:latin typeface="BIZ UDPゴシック"/>
+                <a:ea typeface="BIZ UDPゴシック"/>
+                <a:cs typeface="BIZ UDPゴシック"/>
               </a:rPr>
               <a:t>アプリの画面は変えない（全群の条件を保つ）</a:t>
             </a:r>
@@ -7666,6 +7783,9 @@
                 <a:solidFill>
                   <a:srgbClr val="0B3C6E"/>
                 </a:solidFill>
+                <a:latin typeface="BIZ UDPゴシック"/>
+                <a:ea typeface="BIZ UDPゴシック"/>
+                <a:cs typeface="BIZ UDPゴシック"/>
               </a:rPr>
               <a:t>次の版（修論後）</a:t>
             </a:r>
@@ -7701,7 +7821,7 @@
               <a:buClr>
                 <a:srgbClr val="0099FF"/>
               </a:buClr>
-              <a:buFont typeface="Arial"/>
+              <a:buFont typeface="BIZ UDPゴシック"/>
               <a:buChar char="•"/>
             </a:pPr>
             <a:r>
@@ -7709,6 +7829,9 @@
                 <a:solidFill>
                   <a:srgbClr val="24303F"/>
                 </a:solidFill>
+                <a:latin typeface="BIZ UDPゴシック"/>
+                <a:ea typeface="BIZ UDPゴシック"/>
+                <a:cs typeface="BIZ UDPゴシック"/>
               </a:rPr>
               <a:t>境目の線と「1体＝4点」の対応づけ</a:t>
             </a:r>
@@ -7721,7 +7844,7 @@
               <a:buClr>
                 <a:srgbClr val="0099FF"/>
               </a:buClr>
-              <a:buFont typeface="Arial"/>
+              <a:buFont typeface="BIZ UDPゴシック"/>
               <a:buChar char="•"/>
             </a:pPr>
             <a:r>
@@ -7729,6 +7852,9 @@
                 <a:solidFill>
                   <a:srgbClr val="24303F"/>
                 </a:solidFill>
+                <a:latin typeface="BIZ UDPゴシック"/>
+                <a:ea typeface="BIZ UDPゴシック"/>
+                <a:cs typeface="BIZ UDPゴシック"/>
               </a:rPr>
               <a:t>点の数（20 / 10）を比べる小さな実験</a:t>
             </a:r>
@@ -7741,7 +7867,7 @@
               <a:buClr>
                 <a:srgbClr val="0099FF"/>
               </a:buClr>
-              <a:buFont typeface="Arial"/>
+              <a:buFont typeface="BIZ UDPゴシック"/>
               <a:buChar char="•"/>
             </a:pPr>
             <a:r>
@@ -7749,6 +7875,9 @@
                 <a:solidFill>
                   <a:srgbClr val="24303F"/>
                 </a:solidFill>
+                <a:latin typeface="BIZ UDPゴシック"/>
+                <a:ea typeface="BIZ UDPゴシック"/>
+                <a:cs typeface="BIZ UDPゴシック"/>
               </a:rPr>
               <a:t>ドットのみ・アバターのみ・両方の3条件で、どちらが行動に効くかを切り分ける</a:t>
             </a:r>
@@ -7898,6 +8027,9 @@
                 <a:solidFill>
                   <a:srgbClr val="E8457C"/>
                 </a:solidFill>
+                <a:latin typeface="BIZ UDPゴシック"/>
+                <a:ea typeface="BIZ UDPゴシック"/>
+                <a:cs typeface="BIZ UDPゴシック"/>
               </a:rPr>
               <a:t>注意：事後アンケートへの項目追加は、倫理審査の変更申請が必要かを確認する</a:t>
             </a:r>
@@ -7914,6 +8046,9 @@
                 <a:solidFill>
                   <a:srgbClr val="24303F"/>
                 </a:solidFill>
+                <a:latin typeface="BIZ UDPゴシック"/>
+                <a:ea typeface="BIZ UDPゴシック"/>
+                <a:cs typeface="BIZ UDPゴシック"/>
               </a:rPr>
               <a:t>軽微な変更として届け出で済むかを 11/20 までに事務へ確認。必要なら追加しない</a:t>
             </a:r>
@@ -7966,6 +8101,9 @@
                 <a:solidFill>
                   <a:srgbClr val="24303F"/>
                 </a:solidFill>
+                <a:latin typeface="BIZ UDPゴシック"/>
+                <a:ea typeface="BIZ UDPゴシック"/>
+                <a:cs typeface="BIZ UDPゴシック"/>
               </a:rPr>
               <a:t>議論したいこと</a:t>
             </a:r>
@@ -7984,9 +8122,14 @@
         </p:nvSpPr>
         <p:spPr/>
         <p:txBody>
-          <a:bodyPr/>
-          <a:p>
-            <a:r>
+          <a:bodyPr lIns="27432" rIns="0" wrap="none"/>
+          <a:p>
+            <a:r>
+              <a:rPr sz="900">
+                <a:latin typeface="BIZ UDPゴシック"/>
+                <a:ea typeface="BIZ UDPゴシック"/>
+                <a:cs typeface="BIZ UDPゴシック"/>
+              </a:rPr>
               <a:t>2026/11/13</a:t>
             </a:r>
           </a:p>
@@ -8007,7 +8150,11 @@
           <a:bodyPr/>
           <a:p>
             <a:fld id="{B6F15528-21DE-4FAA-801E-634DDDAF4B2B}" type="slidenum">
-              <a:rPr lang="en-US"/>
+              <a:rPr lang="en-US">
+                <a:latin typeface="BIZ UDPゴシック"/>
+                <a:ea typeface="BIZ UDPゴシック"/>
+                <a:cs typeface="BIZ UDPゴシック"/>
+              </a:rPr>
               <a:t>12</a:t>
             </a:fld>
           </a:p>
@@ -8156,6 +8303,9 @@
                 <a:solidFill>
                   <a:srgbClr val="0B3C6E"/>
                 </a:solidFill>
+                <a:latin typeface="BIZ UDPゴシック"/>
+                <a:ea typeface="BIZ UDPゴシック"/>
+                <a:cs typeface="BIZ UDPゴシック"/>
               </a:rPr>
               <a:t>点の数は20でよいか</a:t>
             </a:r>
@@ -8172,6 +8322,9 @@
                 <a:solidFill>
                   <a:srgbClr val="24303F"/>
                 </a:solidFill>
+                <a:latin typeface="BIZ UDPゴシック"/>
+                <a:ea typeface="BIZ UDPゴシック"/>
+                <a:cs typeface="BIZ UDPゴシック"/>
               </a:rPr>
               <a:t>推し活の利用者にとって、20点と10点のどちらが読みやすいか</a:t>
             </a:r>
@@ -8321,6 +8474,9 @@
                 <a:solidFill>
                   <a:srgbClr val="0B3C6E"/>
                 </a:solidFill>
+                <a:latin typeface="BIZ UDPゴシック"/>
+                <a:ea typeface="BIZ UDPゴシック"/>
+                <a:cs typeface="BIZ UDPゴシック"/>
               </a:rPr>
               <a:t>感情に訴える表示と、数で示す表示</a:t>
             </a:r>
@@ -8337,6 +8493,9 @@
                 <a:solidFill>
                   <a:srgbClr val="24303F"/>
                 </a:solidFill>
+                <a:latin typeface="BIZ UDPゴシック"/>
+                <a:ea typeface="BIZ UDPゴシック"/>
+                <a:cs typeface="BIZ UDPゴシック"/>
               </a:rPr>
               <a:t>アバターの重なりと点の表示は、それぞれ行動のどこに効くのか</a:t>
             </a:r>
@@ -8486,6 +8645,9 @@
                 <a:solidFill>
                   <a:srgbClr val="0B3C6E"/>
                 </a:solidFill>
+                <a:latin typeface="BIZ UDPゴシック"/>
+                <a:ea typeface="BIZ UDPゴシック"/>
+                <a:cs typeface="BIZ UDPゴシック"/>
               </a:rPr>
               <a:t>予測が外れたときの信頼</a:t>
             </a:r>
@@ -8502,6 +8664,9 @@
                 <a:solidFill>
                   <a:srgbClr val="24303F"/>
                 </a:solidFill>
+                <a:latin typeface="BIZ UDPゴシック"/>
+                <a:ea typeface="BIZ UDPゴシック"/>
+                <a:cs typeface="BIZ UDPゴシック"/>
               </a:rPr>
               <a:t>毎週の「答え合わせ」で外れが続いたとき、どう見せれば信頼を保てるか</a:t>
             </a:r>
@@ -8554,6 +8719,9 @@
                 <a:solidFill>
                   <a:srgbClr val="24303F"/>
                 </a:solidFill>
+                <a:latin typeface="BIZ UDPゴシック"/>
+                <a:ea typeface="BIZ UDPゴシック"/>
+                <a:cs typeface="BIZ UDPゴシック"/>
               </a:rPr>
               <a:t>参考文献</a:t>
             </a:r>
@@ -8572,9 +8740,14 @@
         </p:nvSpPr>
         <p:spPr/>
         <p:txBody>
-          <a:bodyPr/>
-          <a:p>
-            <a:r>
+          <a:bodyPr lIns="27432" rIns="0" wrap="none"/>
+          <a:p>
+            <a:r>
+              <a:rPr sz="900">
+                <a:latin typeface="BIZ UDPゴシック"/>
+                <a:ea typeface="BIZ UDPゴシック"/>
+                <a:cs typeface="BIZ UDPゴシック"/>
+              </a:rPr>
               <a:t>2026/11/13</a:t>
             </a:r>
           </a:p>
@@ -8595,7 +8768,11 @@
           <a:bodyPr/>
           <a:p>
             <a:fld id="{B6F15528-21DE-4FAA-801E-634DDDAF4B2B}" type="slidenum">
-              <a:rPr lang="en-US"/>
+              <a:rPr lang="en-US">
+                <a:latin typeface="BIZ UDPゴシック"/>
+                <a:ea typeface="BIZ UDPゴシック"/>
+                <a:cs typeface="BIZ UDPゴシック"/>
+              </a:rPr>
               <a:t>13</a:t>
             </a:fld>
           </a:p>
@@ -8634,6 +8811,9 @@
                 <a:solidFill>
                   <a:srgbClr val="24303F"/>
                 </a:solidFill>
+                <a:latin typeface="BIZ UDPゴシック"/>
+                <a:ea typeface="BIZ UDPゴシック"/>
+                <a:cs typeface="BIZ UDPゴシック"/>
               </a:rPr>
               <a:t>Kay, M., Kola, T., Hullman, J. R., &amp; Munson, S. A. (2016). When (ish) is my bus? User-centered visualizations of uncertainty in everyday, mobile predictive systems. Proceedings of CHI 2016, pp. 5092–5103.</a:t>
             </a:r>
@@ -8650,6 +8830,9 @@
                 <a:solidFill>
                   <a:srgbClr val="24303F"/>
                 </a:solidFill>
+                <a:latin typeface="BIZ UDPゴシック"/>
+                <a:ea typeface="BIZ UDPゴシック"/>
+                <a:cs typeface="BIZ UDPゴシック"/>
               </a:rPr>
               <a:t>Fernandes, M., Walls, L., Munson, S., Hullman, J., &amp; Kay, M. (2018). Uncertainty displays using quantile dotplots or CDFs improve transit decision-making. Proceedings of CHI 2018.</a:t>
             </a:r>
@@ -8666,6 +8849,9 @@
                 <a:solidFill>
                   <a:srgbClr val="24303F"/>
                 </a:solidFill>
+                <a:latin typeface="BIZ UDPゴシック"/>
+                <a:ea typeface="BIZ UDPゴシック"/>
+                <a:cs typeface="BIZ UDPゴシック"/>
               </a:rPr>
               <a:t>Hullman, J., Resnick, P., &amp; Adar, E. (2015). Hypothetical outcome plots outperform error bars and violin plots for inferences about reliability of variable ordering. PLOS ONE, 10(11), e0142444.</a:t>
             </a:r>
@@ -8682,6 +8868,9 @@
                 <a:solidFill>
                   <a:srgbClr val="24303F"/>
                 </a:solidFill>
+                <a:latin typeface="BIZ UDPゴシック"/>
+                <a:ea typeface="BIZ UDPゴシック"/>
+                <a:cs typeface="BIZ UDPゴシック"/>
               </a:rPr>
               <a:t>Gigerenzer, G., &amp; Hoffrage, U. (1995). How to improve Bayesian reasoning without instruction: Frequency formats. Psychological Review, 102(4), 684–704.</a:t>
             </a:r>
@@ -8698,6 +8887,9 @@
                 <a:solidFill>
                   <a:srgbClr val="24303F"/>
                 </a:solidFill>
+                <a:latin typeface="BIZ UDPゴシック"/>
+                <a:ea typeface="BIZ UDPゴシック"/>
+                <a:cs typeface="BIZ UDPゴシック"/>
               </a:rPr>
               <a:t>Wilkinson, L. (1999). Dot plots. The American Statistician, 53(3), 276–281.</a:t>
             </a:r>
@@ -8714,6 +8906,9 @@
                 <a:solidFill>
                   <a:srgbClr val="24303F"/>
                 </a:solidFill>
+                <a:latin typeface="BIZ UDPゴシック"/>
+                <a:ea typeface="BIZ UDPゴシック"/>
+                <a:cs typeface="BIZ UDPゴシック"/>
               </a:rPr>
               <a:t>Hershfield, H. E., et al. (2011). Increasing saving behavior through age-progressed renderings of the future self. Journal of Marketing Research, 48(SPL), S23–S37.</a:t>
             </a:r>
@@ -8766,6 +8961,9 @@
                 <a:solidFill>
                   <a:srgbClr val="24303F"/>
                 </a:solidFill>
+                <a:latin typeface="BIZ UDPゴシック"/>
+                <a:ea typeface="BIZ UDPゴシック"/>
+                <a:cs typeface="BIZ UDPゴシック"/>
               </a:rPr>
               <a:t>論文情報と選んだ理由</a:t>
             </a:r>
@@ -8784,9 +8982,14 @@
         </p:nvSpPr>
         <p:spPr/>
         <p:txBody>
-          <a:bodyPr/>
-          <a:p>
-            <a:r>
+          <a:bodyPr lIns="27432" rIns="0" wrap="none"/>
+          <a:p>
+            <a:r>
+              <a:rPr sz="900">
+                <a:latin typeface="BIZ UDPゴシック"/>
+                <a:ea typeface="BIZ UDPゴシック"/>
+                <a:cs typeface="BIZ UDPゴシック"/>
+              </a:rPr>
               <a:t>2026/11/13</a:t>
             </a:r>
           </a:p>
@@ -8807,7 +9010,11 @@
           <a:bodyPr/>
           <a:p>
             <a:fld id="{B6F15528-21DE-4FAA-801E-634DDDAF4B2B}" type="slidenum">
-              <a:rPr lang="en-US"/>
+              <a:rPr lang="en-US">
+                <a:latin typeface="BIZ UDPゴシック"/>
+                <a:ea typeface="BIZ UDPゴシック"/>
+                <a:cs typeface="BIZ UDPゴシック"/>
+              </a:rPr>
               <a:t>2</a:t>
             </a:fld>
           </a:p>
@@ -8956,6 +9163,9 @@
                 <a:solidFill>
                   <a:srgbClr val="0B3C6E"/>
                 </a:solidFill>
+                <a:latin typeface="BIZ UDPゴシック"/>
+                <a:ea typeface="BIZ UDPゴシック"/>
+                <a:cs typeface="BIZ UDPゴシック"/>
               </a:rPr>
               <a:t>論文情報</a:t>
             </a:r>
@@ -8995,6 +9205,9 @@
                 <a:solidFill>
                   <a:srgbClr val="5A6676"/>
                 </a:solidFill>
+                <a:latin typeface="BIZ UDPゴシック"/>
+                <a:ea typeface="BIZ UDPゴシック"/>
+                <a:cs typeface="BIZ UDPゴシック"/>
               </a:rPr>
               <a:t>タイトル</a:t>
             </a:r>
@@ -9011,6 +9224,9 @@
                 <a:solidFill>
                   <a:srgbClr val="24303F"/>
                 </a:solidFill>
+                <a:latin typeface="BIZ UDPゴシック"/>
+                <a:ea typeface="BIZ UDPゴシック"/>
+                <a:cs typeface="BIZ UDPゴシック"/>
               </a:rPr>
               <a:t>When(ish) is My Bus? User-centered Visualizations of Uncertainty in Everyday, Mobile Predictive Systems</a:t>
             </a:r>
@@ -9027,6 +9243,9 @@
                 <a:solidFill>
                   <a:srgbClr val="5A6676"/>
                 </a:solidFill>
+                <a:latin typeface="BIZ UDPゴシック"/>
+                <a:ea typeface="BIZ UDPゴシック"/>
+                <a:cs typeface="BIZ UDPゴシック"/>
               </a:rPr>
               <a:t>著者</a:t>
             </a:r>
@@ -9043,6 +9262,9 @@
                 <a:solidFill>
                   <a:srgbClr val="24303F"/>
                 </a:solidFill>
+                <a:latin typeface="BIZ UDPゴシック"/>
+                <a:ea typeface="BIZ UDPゴシック"/>
+                <a:cs typeface="BIZ UDPゴシック"/>
               </a:rPr>
               <a:t>Matthew Kay, Tara Kola, Jessica R. Hullman, Sean A. Munson</a:t>
             </a:r>
@@ -9059,6 +9281,9 @@
                 <a:solidFill>
                   <a:srgbClr val="5A6676"/>
                 </a:solidFill>
+                <a:latin typeface="BIZ UDPゴシック"/>
+                <a:ea typeface="BIZ UDPゴシック"/>
+                <a:cs typeface="BIZ UDPゴシック"/>
               </a:rPr>
               <a:t>掲載</a:t>
             </a:r>
@@ -9075,6 +9300,9 @@
                 <a:solidFill>
                   <a:srgbClr val="24303F"/>
                 </a:solidFill>
+                <a:latin typeface="BIZ UDPゴシック"/>
+                <a:ea typeface="BIZ UDPゴシック"/>
+                <a:cs typeface="BIZ UDPゴシック"/>
               </a:rPr>
               <a:t>Proceedings of CHI 2016, pp. 5092–5103</a:t>
             </a:r>
@@ -9091,6 +9319,9 @@
                 <a:solidFill>
                   <a:srgbClr val="5A6676"/>
                 </a:solidFill>
+                <a:latin typeface="BIZ UDPゴシック"/>
+                <a:ea typeface="BIZ UDPゴシック"/>
+                <a:cs typeface="BIZ UDPゴシック"/>
               </a:rPr>
               <a:t>DOI</a:t>
             </a:r>
@@ -9107,6 +9338,9 @@
                 <a:solidFill>
                   <a:srgbClr val="24303F"/>
                 </a:solidFill>
+                <a:latin typeface="BIZ UDPゴシック"/>
+                <a:ea typeface="BIZ UDPゴシック"/>
+                <a:cs typeface="BIZ UDPゴシック"/>
               </a:rPr>
               <a:t>10.1145/2858036.2858558</a:t>
             </a:r>
@@ -9264,6 +9498,9 @@
                 <a:solidFill>
                   <a:srgbClr val="0B3C6E"/>
                 </a:solidFill>
+                <a:latin typeface="BIZ UDPゴシック"/>
+                <a:ea typeface="BIZ UDPゴシック"/>
+                <a:cs typeface="BIZ UDPゴシック"/>
               </a:rPr>
               <a:t>OshiFit の予測は誤差が大きい</a:t>
             </a:r>
@@ -9303,6 +9540,9 @@
                 <a:solidFill>
                   <a:srgbClr val="24303F"/>
                 </a:solidFill>
+                <a:latin typeface="BIZ UDPゴシック"/>
+                <a:ea typeface="BIZ UDPゴシック"/>
+                <a:cs typeface="BIZ UDPゴシック"/>
               </a:rPr>
               <a:t>推し疲れは ±0.92（5段階）。幅をどう見せるかが設計の中心</a:t>
             </a:r>
@@ -9460,6 +9700,9 @@
                 <a:solidFill>
                   <a:srgbClr val="0B3C6E"/>
                 </a:solidFill>
+                <a:latin typeface="BIZ UDPゴシック"/>
+                <a:ea typeface="BIZ UDPゴシック"/>
+                <a:cs typeface="BIZ UDPゴシック"/>
               </a:rPr>
               <a:t>問題設定がほぼ同じ</a:t>
             </a:r>
@@ -9499,6 +9742,9 @@
                 <a:solidFill>
                   <a:srgbClr val="24303F"/>
                 </a:solidFill>
+                <a:latin typeface="BIZ UDPゴシック"/>
+                <a:ea typeface="BIZ UDPゴシック"/>
+                <a:cs typeface="BIZ UDPゴシック"/>
               </a:rPr>
               <a:t>スマホ × 一般の利用者 × 日常の予測</a:t>
             </a:r>
@@ -9656,6 +9902,9 @@
                 <a:solidFill>
                   <a:srgbClr val="0B3C6E"/>
                 </a:solidFill>
+                <a:latin typeface="BIZ UDPゴシック"/>
+                <a:ea typeface="BIZ UDPゴシック"/>
+                <a:cs typeface="BIZ UDPゴシック"/>
               </a:rPr>
               <a:t>操作確認で出た課題</a:t>
             </a:r>
@@ -9695,6 +9944,9 @@
                 <a:solidFill>
                   <a:srgbClr val="24303F"/>
                 </a:solidFill>
+                <a:latin typeface="BIZ UDPゴシック"/>
+                <a:ea typeface="BIZ UDPゴシック"/>
+                <a:cs typeface="BIZ UDPゴシック"/>
               </a:rPr>
               <a:t>「ぼやけの意味が分からない」(2/6名) を解くヒント</a:t>
             </a:r>
@@ -9747,6 +9999,9 @@
                 <a:solidFill>
                   <a:srgbClr val="24303F"/>
                 </a:solidFill>
+                <a:latin typeface="BIZ UDPゴシック"/>
+                <a:ea typeface="BIZ UDPゴシック"/>
+                <a:cs typeface="BIZ UDPゴシック"/>
               </a:rPr>
               <a:t>背景：日常の予測は「外れる」もの</a:t>
             </a:r>
@@ -9765,9 +10020,14 @@
         </p:nvSpPr>
         <p:spPr/>
         <p:txBody>
-          <a:bodyPr/>
-          <a:p>
-            <a:r>
+          <a:bodyPr lIns="27432" rIns="0" wrap="none"/>
+          <a:p>
+            <a:r>
+              <a:rPr sz="900">
+                <a:latin typeface="BIZ UDPゴシック"/>
+                <a:ea typeface="BIZ UDPゴシック"/>
+                <a:cs typeface="BIZ UDPゴシック"/>
+              </a:rPr>
               <a:t>2026/11/13</a:t>
             </a:r>
           </a:p>
@@ -9788,7 +10048,11 @@
           <a:bodyPr/>
           <a:p>
             <a:fld id="{B6F15528-21DE-4FAA-801E-634DDDAF4B2B}" type="slidenum">
-              <a:rPr lang="en-US"/>
+              <a:rPr lang="en-US">
+                <a:latin typeface="BIZ UDPゴシック"/>
+                <a:ea typeface="BIZ UDPゴシック"/>
+                <a:cs typeface="BIZ UDPゴシック"/>
+              </a:rPr>
               <a:t>3</a:t>
             </a:fld>
           </a:p>
@@ -9945,6 +10209,9 @@
                 <a:solidFill>
                   <a:srgbClr val="0B3C6E"/>
                 </a:solidFill>
+                <a:latin typeface="BIZ UDPゴシック"/>
+                <a:ea typeface="BIZ UDPゴシック"/>
+                <a:cs typeface="BIZ UDPゴシック"/>
               </a:rPr>
               <a:t>「あと5分」の表示</a:t>
             </a:r>
@@ -9980,7 +10247,7 @@
               <a:buClr>
                 <a:srgbClr val="0099FF"/>
               </a:buClr>
-              <a:buFont typeface="Arial"/>
+              <a:buFont typeface="BIZ UDPゴシック"/>
               <a:buChar char="•"/>
             </a:pPr>
             <a:r>
@@ -9988,6 +10255,9 @@
                 <a:solidFill>
                   <a:srgbClr val="24303F"/>
                 </a:solidFill>
+                <a:latin typeface="BIZ UDPゴシック"/>
+                <a:ea typeface="BIZ UDPゴシック"/>
+                <a:cs typeface="BIZ UDPゴシック"/>
               </a:rPr>
               <a:t>実際には3分で来ることも、9分かかることもある</a:t>
             </a:r>
@@ -10000,7 +10270,7 @@
               <a:buClr>
                 <a:srgbClr val="0099FF"/>
               </a:buClr>
-              <a:buFont typeface="Arial"/>
+              <a:buFont typeface="BIZ UDPゴシック"/>
               <a:buChar char="•"/>
             </a:pPr>
             <a:r>
@@ -10008,6 +10278,9 @@
                 <a:solidFill>
                   <a:srgbClr val="24303F"/>
                 </a:solidFill>
+                <a:latin typeface="BIZ UDPゴシック"/>
+                <a:ea typeface="BIZ UDPゴシック"/>
+                <a:cs typeface="BIZ UDPゴシック"/>
               </a:rPr>
               <a:t>点の予測だけだと、外れたときに「当てにならない」と感じる</a:t>
             </a:r>
@@ -10165,6 +10438,9 @@
                 <a:solidFill>
                   <a:srgbClr val="0B3C6E"/>
                 </a:solidFill>
+                <a:latin typeface="BIZ UDPゴシック"/>
+                <a:ea typeface="BIZ UDPゴシック"/>
+                <a:cs typeface="BIZ UDPゴシック"/>
               </a:rPr>
               <a:t>分布の図は読みにくい</a:t>
             </a:r>
@@ -10200,7 +10476,7 @@
               <a:buClr>
                 <a:srgbClr val="0099FF"/>
               </a:buClr>
-              <a:buFont typeface="Arial"/>
+              <a:buFont typeface="BIZ UDPゴシック"/>
               <a:buChar char="•"/>
             </a:pPr>
             <a:r>
@@ -10208,6 +10484,9 @@
                 <a:solidFill>
                   <a:srgbClr val="24303F"/>
                 </a:solidFill>
+                <a:latin typeface="BIZ UDPゴシック"/>
+                <a:ea typeface="BIZ UDPゴシック"/>
+                <a:cs typeface="BIZ UDPゴシック"/>
               </a:rPr>
               <a:t>密度の山から「◯分以内に来る確率」を読むのは難しい</a:t>
             </a:r>
@@ -10220,7 +10499,7 @@
               <a:buClr>
                 <a:srgbClr val="0099FF"/>
               </a:buClr>
-              <a:buFont typeface="Arial"/>
+              <a:buFont typeface="BIZ UDPゴシック"/>
               <a:buChar char="•"/>
             </a:pPr>
             <a:r>
@@ -10228,6 +10507,9 @@
                 <a:solidFill>
                   <a:srgbClr val="24303F"/>
                 </a:solidFill>
+                <a:latin typeface="BIZ UDPゴシック"/>
+                <a:ea typeface="BIZ UDPゴシック"/>
+                <a:cs typeface="BIZ UDPゴシック"/>
               </a:rPr>
               <a:t>スマホの小さな画面では、なおさら</a:t>
             </a:r>
@@ -10311,6 +10593,9 @@
                 <a:solidFill>
                   <a:srgbClr val="CCE9FF"/>
                 </a:solidFill>
+                <a:latin typeface="BIZ UDPゴシック"/>
+                <a:ea typeface="BIZ UDPゴシック"/>
+                <a:cs typeface="BIZ UDPゴシック"/>
               </a:rPr>
               <a:t>手がかり：頻度での表現</a:t>
             </a:r>
@@ -10327,6 +10612,9 @@
                 <a:solidFill>
                   <a:srgbClr val="FFFFFF"/>
                 </a:solidFill>
+                <a:latin typeface="BIZ UDPゴシック"/>
+                <a:ea typeface="BIZ UDPゴシック"/>
+                <a:cs typeface="BIZ UDPゴシック"/>
               </a:rPr>
               <a:t>「30%」より「10回中3回」の方が分かりやすい</a:t>
             </a:r>
@@ -10343,6 +10631,9 @@
                 <a:solidFill>
                   <a:srgbClr val="FFFFFF"/>
                 </a:solidFill>
+                <a:latin typeface="BIZ UDPゴシック"/>
+                <a:ea typeface="BIZ UDPゴシック"/>
+                <a:cs typeface="BIZ UDPゴシック"/>
               </a:rPr>
               <a:t>確率を頻度で示すと推論が正確になる（Gigerenzer &amp; Hoffrage, 1995）</a:t>
             </a:r>
@@ -10815,6 +11106,9 @@
                 <a:solidFill>
                   <a:srgbClr val="24303F"/>
                 </a:solidFill>
+                <a:latin typeface="BIZ UDPゴシック"/>
+                <a:ea typeface="BIZ UDPゴシック"/>
+                <a:cs typeface="BIZ UDPゴシック"/>
               </a:rPr>
               <a:t>研究の進め方</a:t>
             </a:r>
@@ -10833,9 +11127,14 @@
         </p:nvSpPr>
         <p:spPr/>
         <p:txBody>
-          <a:bodyPr/>
-          <a:p>
-            <a:r>
+          <a:bodyPr lIns="27432" rIns="0" wrap="none"/>
+          <a:p>
+            <a:r>
+              <a:rPr sz="900">
+                <a:latin typeface="BIZ UDPゴシック"/>
+                <a:ea typeface="BIZ UDPゴシック"/>
+                <a:cs typeface="BIZ UDPゴシック"/>
+              </a:rPr>
               <a:t>2026/11/13</a:t>
             </a:r>
           </a:p>
@@ -10856,7 +11155,11 @@
           <a:bodyPr/>
           <a:p>
             <a:fld id="{B6F15528-21DE-4FAA-801E-634DDDAF4B2B}" type="slidenum">
-              <a:rPr lang="en-US"/>
+              <a:rPr lang="en-US">
+                <a:latin typeface="BIZ UDPゴシック"/>
+                <a:ea typeface="BIZ UDPゴシック"/>
+                <a:cs typeface="BIZ UDPゴシック"/>
+              </a:rPr>
               <a:t>4</a:t>
             </a:fld>
           </a:p>
@@ -11005,6 +11308,9 @@
                 <a:solidFill>
                   <a:srgbClr val="0B3C6E"/>
                 </a:solidFill>
+                <a:latin typeface="BIZ UDPゴシック"/>
+                <a:ea typeface="BIZ UDPゴシック"/>
+                <a:cs typeface="BIZ UDPゴシック"/>
               </a:rPr>
               <a:t>1. 文献調査</a:t>
             </a:r>
@@ -11044,6 +11350,9 @@
                 <a:solidFill>
                   <a:srgbClr val="24303F"/>
                 </a:solidFill>
+                <a:latin typeface="BIZ UDPゴシック"/>
+                <a:ea typeface="BIZ UDPゴシック"/>
+                <a:cs typeface="BIZ UDPゴシック"/>
               </a:rPr>
               <a:t>不確かさの可視化と</a:t>
             </a:r>
@@ -11060,6 +11369,9 @@
                 <a:solidFill>
                   <a:srgbClr val="24303F"/>
                 </a:solidFill>
+                <a:latin typeface="BIZ UDPゴシック"/>
+                <a:ea typeface="BIZ UDPゴシック"/>
+                <a:cs typeface="BIZ UDPゴシック"/>
               </a:rPr>
               <a:t>確率の理解の研究</a:t>
             </a:r>
@@ -11251,6 +11563,9 @@
                 <a:solidFill>
                   <a:srgbClr val="0B3C6E"/>
                 </a:solidFill>
+                <a:latin typeface="BIZ UDPゴシック"/>
+                <a:ea typeface="BIZ UDPゴシック"/>
+                <a:cs typeface="BIZ UDPゴシック"/>
               </a:rPr>
               <a:t>2. 利用者アンケート</a:t>
             </a:r>
@@ -11290,6 +11605,9 @@
                 <a:solidFill>
                   <a:srgbClr val="24303F"/>
                 </a:solidFill>
+                <a:latin typeface="BIZ UDPゴシック"/>
+                <a:ea typeface="BIZ UDPゴシック"/>
+                <a:cs typeface="BIZ UDPゴシック"/>
               </a:rPr>
               <a:t>乗換アプリ OneBusAway の</a:t>
             </a:r>
@@ -11306,6 +11624,9 @@
                 <a:solidFill>
                   <a:srgbClr val="24303F"/>
                 </a:solidFill>
+                <a:latin typeface="BIZ UDPゴシック"/>
+                <a:ea typeface="BIZ UDPゴシック"/>
+                <a:cs typeface="BIZ UDPゴシック"/>
               </a:rPr>
               <a:t>利用者が予測をどう使うか</a:t>
             </a:r>
@@ -11497,6 +11818,9 @@
                 <a:solidFill>
                   <a:srgbClr val="0B3C6E"/>
                 </a:solidFill>
+                <a:latin typeface="BIZ UDPゴシック"/>
+                <a:ea typeface="BIZ UDPゴシック"/>
+                <a:cs typeface="BIZ UDPゴシック"/>
               </a:rPr>
               <a:t>3. 反復的なデザイン</a:t>
             </a:r>
@@ -11536,6 +11860,9 @@
                 <a:solidFill>
                   <a:srgbClr val="24303F"/>
                 </a:solidFill>
+                <a:latin typeface="BIZ UDPゴシック"/>
+                <a:ea typeface="BIZ UDPゴシック"/>
+                <a:cs typeface="BIZ UDPゴシック"/>
               </a:rPr>
               <a:t>スマホ向けの候補を</a:t>
             </a:r>
@@ -11552,6 +11879,9 @@
                 <a:solidFill>
                   <a:srgbClr val="24303F"/>
                 </a:solidFill>
+                <a:latin typeface="BIZ UDPゴシック"/>
+                <a:ea typeface="BIZ UDPゴシック"/>
+                <a:cs typeface="BIZ UDPゴシック"/>
               </a:rPr>
               <a:t>複数つくって改良</a:t>
             </a:r>
@@ -11743,6 +12073,9 @@
                 <a:solidFill>
                   <a:srgbClr val="FFFFFF"/>
                 </a:solidFill>
+                <a:latin typeface="BIZ UDPゴシック"/>
+                <a:ea typeface="BIZ UDPゴシック"/>
+                <a:cs typeface="BIZ UDPゴシック"/>
               </a:rPr>
               <a:t>4. 統制実験</a:t>
             </a:r>
@@ -11782,6 +12115,9 @@
                 <a:solidFill>
                   <a:srgbClr val="FFFFFF"/>
                 </a:solidFill>
+                <a:latin typeface="BIZ UDPゴシック"/>
+                <a:ea typeface="BIZ UDPゴシック"/>
+                <a:cs typeface="BIZ UDPゴシック"/>
               </a:rPr>
               <a:t>候補の表示で</a:t>
             </a:r>
@@ -11798,6 +12134,9 @@
                 <a:solidFill>
                   <a:srgbClr val="FFFFFF"/>
                 </a:solidFill>
+                <a:latin typeface="BIZ UDPゴシック"/>
+                <a:ea typeface="BIZ UDPゴシック"/>
+                <a:cs typeface="BIZ UDPゴシック"/>
               </a:rPr>
               <a:t>確率を読み取ってもらう</a:t>
             </a:r>
@@ -11955,6 +12294,9 @@
                 <a:solidFill>
                   <a:srgbClr val="0B3C6E"/>
                 </a:solidFill>
+                <a:latin typeface="BIZ UDPゴシック"/>
+                <a:ea typeface="BIZ UDPゴシック"/>
+                <a:cs typeface="BIZ UDPゴシック"/>
               </a:rPr>
               <a:t>アンケートから見えた利用の仕方（要点）</a:t>
             </a:r>
@@ -11990,7 +12332,7 @@
               <a:buClr>
                 <a:srgbClr val="0099FF"/>
               </a:buClr>
-              <a:buFont typeface="Arial"/>
+              <a:buFont typeface="BIZ UDPゴシック"/>
               <a:buChar char="•"/>
             </a:pPr>
             <a:r>
@@ -11998,6 +12340,9 @@
                 <a:solidFill>
                   <a:srgbClr val="24303F"/>
                 </a:solidFill>
+                <a:latin typeface="BIZ UDPゴシック"/>
+                <a:ea typeface="BIZ UDPゴシック"/>
+                <a:cs typeface="BIZ UDPゴシック"/>
               </a:rPr>
               <a:t>利用者は予測を「判断」に使う：もう出発したか？ 走るべきか？ 家を出るのはいつか？</a:t>
             </a:r>
@@ -12010,7 +12355,7 @@
               <a:buClr>
                 <a:srgbClr val="E8457C"/>
               </a:buClr>
-              <a:buFont typeface="Arial"/>
+              <a:buFont typeface="BIZ UDPゴシック"/>
               <a:buChar char="•"/>
             </a:pPr>
             <a:r>
@@ -12018,6 +12363,9 @@
                 <a:solidFill>
                   <a:srgbClr val="24303F"/>
                 </a:solidFill>
+                <a:latin typeface="BIZ UDPゴシック"/>
+                <a:ea typeface="BIZ UDPゴシック"/>
+                <a:cs typeface="BIZ UDPゴシック"/>
               </a:rPr>
               <a:t>→ 判断に直結する確率（◯分までに来る確率）が、一目で読み取れる表示が必要</a:t>
             </a:r>
@@ -12070,6 +12418,9 @@
                 <a:solidFill>
                   <a:srgbClr val="24303F"/>
                 </a:solidFill>
+                <a:latin typeface="BIZ UDPゴシック"/>
+                <a:ea typeface="BIZ UDPゴシック"/>
+                <a:cs typeface="BIZ UDPゴシック"/>
               </a:rPr>
               <a:t>提案：quantile dotplot（分位点ドット図）</a:t>
             </a:r>
@@ -12088,9 +12439,14 @@
         </p:nvSpPr>
         <p:spPr/>
         <p:txBody>
-          <a:bodyPr/>
-          <a:p>
-            <a:r>
+          <a:bodyPr lIns="27432" rIns="0" wrap="none"/>
+          <a:p>
+            <a:r>
+              <a:rPr sz="900">
+                <a:latin typeface="BIZ UDPゴシック"/>
+                <a:ea typeface="BIZ UDPゴシック"/>
+                <a:cs typeface="BIZ UDPゴシック"/>
+              </a:rPr>
               <a:t>2026/11/13</a:t>
             </a:r>
           </a:p>
@@ -12111,7 +12467,11 @@
           <a:bodyPr/>
           <a:p>
             <a:fld id="{B6F15528-21DE-4FAA-801E-634DDDAF4B2B}" type="slidenum">
-              <a:rPr lang="en-US"/>
+              <a:rPr lang="en-US">
+                <a:latin typeface="BIZ UDPゴシック"/>
+                <a:ea typeface="BIZ UDPゴシック"/>
+                <a:cs typeface="BIZ UDPゴシック"/>
+              </a:rPr>
               <a:t>5</a:t>
             </a:fld>
           </a:p>
@@ -12150,6 +12510,9 @@
                 <a:solidFill>
                   <a:srgbClr val="5A6676"/>
                 </a:solidFill>
+                <a:latin typeface="BIZ UDPゴシック"/>
+                <a:ea typeface="BIZ UDPゴシック"/>
+                <a:cs typeface="BIZ UDPゴシック"/>
               </a:rPr>
               <a:t>従来：密度の図</a:t>
             </a:r>
@@ -12503,6 +12866,9 @@
                 <a:solidFill>
                   <a:srgbClr val="5A6676"/>
                 </a:solidFill>
+                <a:latin typeface="BIZ UDPゴシック"/>
+                <a:ea typeface="BIZ UDPゴシック"/>
+                <a:cs typeface="BIZ UDPゴシック"/>
               </a:rPr>
               <a:t>0</a:t>
             </a:r>
@@ -12577,6 +12943,9 @@
                 <a:solidFill>
                   <a:srgbClr val="5A6676"/>
                 </a:solidFill>
+                <a:latin typeface="BIZ UDPゴシック"/>
+                <a:ea typeface="BIZ UDPゴシック"/>
+                <a:cs typeface="BIZ UDPゴシック"/>
               </a:rPr>
               <a:t>2</a:t>
             </a:r>
@@ -12651,6 +13020,9 @@
                 <a:solidFill>
                   <a:srgbClr val="5A6676"/>
                 </a:solidFill>
+                <a:latin typeface="BIZ UDPゴシック"/>
+                <a:ea typeface="BIZ UDPゴシック"/>
+                <a:cs typeface="BIZ UDPゴシック"/>
               </a:rPr>
               <a:t>4</a:t>
             </a:r>
@@ -12725,6 +13097,9 @@
                 <a:solidFill>
                   <a:srgbClr val="5A6676"/>
                 </a:solidFill>
+                <a:latin typeface="BIZ UDPゴシック"/>
+                <a:ea typeface="BIZ UDPゴシック"/>
+                <a:cs typeface="BIZ UDPゴシック"/>
               </a:rPr>
               <a:t>6</a:t>
             </a:r>
@@ -12799,6 +13174,9 @@
                 <a:solidFill>
                   <a:srgbClr val="5A6676"/>
                 </a:solidFill>
+                <a:latin typeface="BIZ UDPゴシック"/>
+                <a:ea typeface="BIZ UDPゴシック"/>
+                <a:cs typeface="BIZ UDPゴシック"/>
               </a:rPr>
               <a:t>8</a:t>
             </a:r>
@@ -12873,6 +13251,9 @@
                 <a:solidFill>
                   <a:srgbClr val="5A6676"/>
                 </a:solidFill>
+                <a:latin typeface="BIZ UDPゴシック"/>
+                <a:ea typeface="BIZ UDPゴシック"/>
+                <a:cs typeface="BIZ UDPゴシック"/>
               </a:rPr>
               <a:t>10</a:t>
             </a:r>
@@ -12947,6 +13328,9 @@
                 <a:solidFill>
                   <a:srgbClr val="5A6676"/>
                 </a:solidFill>
+                <a:latin typeface="BIZ UDPゴシック"/>
+                <a:ea typeface="BIZ UDPゴシック"/>
+                <a:cs typeface="BIZ UDPゴシック"/>
               </a:rPr>
               <a:t>12</a:t>
             </a:r>
@@ -13021,6 +13405,9 @@
                 <a:solidFill>
                   <a:srgbClr val="5A6676"/>
                 </a:solidFill>
+                <a:latin typeface="BIZ UDPゴシック"/>
+                <a:ea typeface="BIZ UDPゴシック"/>
+                <a:cs typeface="BIZ UDPゴシック"/>
               </a:rPr>
               <a:t>14</a:t>
             </a:r>
@@ -13060,6 +13447,9 @@
                 <a:solidFill>
                   <a:srgbClr val="5A6676"/>
                 </a:solidFill>
+                <a:latin typeface="BIZ UDPゴシック"/>
+                <a:ea typeface="BIZ UDPゴシック"/>
+                <a:cs typeface="BIZ UDPゴシック"/>
               </a:rPr>
               <a:t>到着までの分</a:t>
             </a:r>
@@ -13099,6 +13489,9 @@
                 <a:solidFill>
                   <a:srgbClr val="12A38A"/>
                 </a:solidFill>
+                <a:latin typeface="BIZ UDPゴシック"/>
+                <a:ea typeface="BIZ UDPゴシック"/>
+                <a:cs typeface="BIZ UDPゴシック"/>
               </a:rPr>
               <a:t>提案：20個の点で示す</a:t>
             </a:r>
@@ -14048,6 +14441,9 @@
                 <a:solidFill>
                   <a:srgbClr val="5A6676"/>
                 </a:solidFill>
+                <a:latin typeface="BIZ UDPゴシック"/>
+                <a:ea typeface="BIZ UDPゴシック"/>
+                <a:cs typeface="BIZ UDPゴシック"/>
               </a:rPr>
               <a:t>0</a:t>
             </a:r>
@@ -14122,6 +14518,9 @@
                 <a:solidFill>
                   <a:srgbClr val="5A6676"/>
                 </a:solidFill>
+                <a:latin typeface="BIZ UDPゴシック"/>
+                <a:ea typeface="BIZ UDPゴシック"/>
+                <a:cs typeface="BIZ UDPゴシック"/>
               </a:rPr>
               <a:t>2</a:t>
             </a:r>
@@ -14196,6 +14595,9 @@
                 <a:solidFill>
                   <a:srgbClr val="5A6676"/>
                 </a:solidFill>
+                <a:latin typeface="BIZ UDPゴシック"/>
+                <a:ea typeface="BIZ UDPゴシック"/>
+                <a:cs typeface="BIZ UDPゴシック"/>
               </a:rPr>
               <a:t>4</a:t>
             </a:r>
@@ -14270,6 +14672,9 @@
                 <a:solidFill>
                   <a:srgbClr val="5A6676"/>
                 </a:solidFill>
+                <a:latin typeface="BIZ UDPゴシック"/>
+                <a:ea typeface="BIZ UDPゴシック"/>
+                <a:cs typeface="BIZ UDPゴシック"/>
               </a:rPr>
               <a:t>6</a:t>
             </a:r>
@@ -14344,6 +14749,9 @@
                 <a:solidFill>
                   <a:srgbClr val="5A6676"/>
                 </a:solidFill>
+                <a:latin typeface="BIZ UDPゴシック"/>
+                <a:ea typeface="BIZ UDPゴシック"/>
+                <a:cs typeface="BIZ UDPゴシック"/>
               </a:rPr>
               <a:t>8</a:t>
             </a:r>
@@ -14418,6 +14826,9 @@
                 <a:solidFill>
                   <a:srgbClr val="5A6676"/>
                 </a:solidFill>
+                <a:latin typeface="BIZ UDPゴシック"/>
+                <a:ea typeface="BIZ UDPゴシック"/>
+                <a:cs typeface="BIZ UDPゴシック"/>
               </a:rPr>
               <a:t>10</a:t>
             </a:r>
@@ -14492,6 +14903,9 @@
                 <a:solidFill>
                   <a:srgbClr val="5A6676"/>
                 </a:solidFill>
+                <a:latin typeface="BIZ UDPゴシック"/>
+                <a:ea typeface="BIZ UDPゴシック"/>
+                <a:cs typeface="BIZ UDPゴシック"/>
               </a:rPr>
               <a:t>12</a:t>
             </a:r>
@@ -14566,6 +14980,9 @@
                 <a:solidFill>
                   <a:srgbClr val="5A6676"/>
                 </a:solidFill>
+                <a:latin typeface="BIZ UDPゴシック"/>
+                <a:ea typeface="BIZ UDPゴシック"/>
+                <a:cs typeface="BIZ UDPゴシック"/>
               </a:rPr>
               <a:t>14</a:t>
             </a:r>
@@ -14605,6 +15022,9 @@
                 <a:solidFill>
                   <a:srgbClr val="5A6676"/>
                 </a:solidFill>
+                <a:latin typeface="BIZ UDPゴシック"/>
+                <a:ea typeface="BIZ UDPゴシック"/>
+                <a:cs typeface="BIZ UDPゴシック"/>
               </a:rPr>
               <a:t>到着までの分</a:t>
             </a:r>
@@ -14664,6 +15084,9 @@
                 <a:solidFill>
                   <a:srgbClr val="FFFFFF"/>
                 </a:solidFill>
+                <a:latin typeface="BIZ UDPゴシック"/>
+                <a:ea typeface="BIZ UDPゴシック"/>
+                <a:cs typeface="BIZ UDPゴシック"/>
               </a:rPr>
               <a:t>1</a:t>
             </a:r>
@@ -14703,6 +15126,9 @@
                 <a:solidFill>
                   <a:srgbClr val="0B3C6E"/>
                 </a:solidFill>
+                <a:latin typeface="BIZ UDPゴシック"/>
+                <a:ea typeface="BIZ UDPゴシック"/>
+                <a:cs typeface="BIZ UDPゴシック"/>
               </a:rPr>
               <a:t>予測分布から20個の分位点をとる</a:t>
             </a:r>
@@ -14762,6 +15188,9 @@
                 <a:solidFill>
                   <a:srgbClr val="FFFFFF"/>
                 </a:solidFill>
+                <a:latin typeface="BIZ UDPゴシック"/>
+                <a:ea typeface="BIZ UDPゴシック"/>
+                <a:cs typeface="BIZ UDPゴシック"/>
               </a:rPr>
               <a:t>2</a:t>
             </a:r>
@@ -14801,6 +15230,9 @@
                 <a:solidFill>
                   <a:srgbClr val="0B3C6E"/>
                 </a:solidFill>
+                <a:latin typeface="BIZ UDPゴシック"/>
+                <a:ea typeface="BIZ UDPゴシック"/>
+                <a:cs typeface="BIZ UDPゴシック"/>
               </a:rPr>
               <a:t>1点＝5%の確率として描く</a:t>
             </a:r>
@@ -14860,6 +15292,9 @@
                 <a:solidFill>
                   <a:srgbClr val="FFFFFF"/>
                 </a:solidFill>
+                <a:latin typeface="BIZ UDPゴシック"/>
+                <a:ea typeface="BIZ UDPゴシック"/>
+                <a:cs typeface="BIZ UDPゴシック"/>
               </a:rPr>
               <a:t>3</a:t>
             </a:r>
@@ -14899,6 +15334,9 @@
                 <a:solidFill>
                   <a:srgbClr val="0B3C6E"/>
                 </a:solidFill>
+                <a:latin typeface="BIZ UDPゴシック"/>
+                <a:ea typeface="BIZ UDPゴシック"/>
+                <a:cs typeface="BIZ UDPゴシック"/>
               </a:rPr>
               <a:t>同じ区間の点を積み上げる</a:t>
             </a:r>
@@ -14982,6 +15420,9 @@
                 <a:solidFill>
                   <a:srgbClr val="12A38A"/>
                 </a:solidFill>
+                <a:latin typeface="BIZ UDPゴシック"/>
+                <a:ea typeface="BIZ UDPゴシック"/>
+                <a:cs typeface="BIZ UDPゴシック"/>
               </a:rPr>
               <a:t>「5分以内に来る確率は？」→ 左から点を数えるだけ（例：4個 × 5% ＝ 20%）</a:t>
             </a:r>
@@ -14998,6 +15439,9 @@
                 <a:solidFill>
                   <a:srgbClr val="24303F"/>
                 </a:solidFill>
+                <a:latin typeface="BIZ UDPゴシック"/>
+                <a:ea typeface="BIZ UDPゴシック"/>
+                <a:cs typeface="BIZ UDPゴシック"/>
               </a:rPr>
               <a:t>連続した分布を「数えられる結果」に変える。小さな画面でも一目で読める</a:t>
             </a:r>
@@ -15050,6 +15494,9 @@
                 <a:solidFill>
                   <a:srgbClr val="24303F"/>
                 </a:solidFill>
+                <a:latin typeface="BIZ UDPゴシック"/>
+                <a:ea typeface="BIZ UDPゴシック"/>
+                <a:cs typeface="BIZ UDPゴシック"/>
               </a:rPr>
               <a:t>統制実験の設計</a:t>
             </a:r>
@@ -15068,9 +15515,14 @@
         </p:nvSpPr>
         <p:spPr/>
         <p:txBody>
-          <a:bodyPr/>
-          <a:p>
-            <a:r>
+          <a:bodyPr lIns="27432" rIns="0" wrap="none"/>
+          <a:p>
+            <a:r>
+              <a:rPr sz="900">
+                <a:latin typeface="BIZ UDPゴシック"/>
+                <a:ea typeface="BIZ UDPゴシック"/>
+                <a:cs typeface="BIZ UDPゴシック"/>
+              </a:rPr>
               <a:t>2026/11/13</a:t>
             </a:r>
           </a:p>
@@ -15091,7 +15543,11 @@
           <a:bodyPr/>
           <a:p>
             <a:fld id="{B6F15528-21DE-4FAA-801E-634DDDAF4B2B}" type="slidenum">
-              <a:rPr lang="en-US"/>
+              <a:rPr lang="en-US">
+                <a:latin typeface="BIZ UDPゴシック"/>
+                <a:ea typeface="BIZ UDPゴシック"/>
+                <a:cs typeface="BIZ UDPゴシック"/>
+              </a:rPr>
               <a:t>6</a:t>
             </a:fld>
           </a:p>
@@ -15248,6 +15704,9 @@
                 <a:solidFill>
                   <a:srgbClr val="0B3C6E"/>
                 </a:solidFill>
+                <a:latin typeface="BIZ UDPゴシック"/>
+                <a:ea typeface="BIZ UDPゴシック"/>
+                <a:cs typeface="BIZ UDPゴシック"/>
               </a:rPr>
               <a:t>比べた表示</a:t>
             </a:r>
@@ -15287,6 +15746,9 @@
                 <a:solidFill>
                   <a:srgbClr val="24303F"/>
                 </a:solidFill>
+                <a:latin typeface="BIZ UDPゴシック"/>
+                <a:ea typeface="BIZ UDPゴシック"/>
+                <a:cs typeface="BIZ UDPゴシック"/>
               </a:rPr>
               <a:t>密度の図などの従来の表示と、quantile dotplot（点の数を変えた条件を含む）</a:t>
             </a:r>
@@ -15444,6 +15906,9 @@
                 <a:solidFill>
                   <a:srgbClr val="0B3C6E"/>
                 </a:solidFill>
+                <a:latin typeface="BIZ UDPゴシック"/>
+                <a:ea typeface="BIZ UDPゴシック"/>
+                <a:cs typeface="BIZ UDPゴシック"/>
               </a:rPr>
               <a:t>課題</a:t>
             </a:r>
@@ -15483,6 +15948,9 @@
                 <a:solidFill>
                   <a:srgbClr val="24303F"/>
                 </a:solidFill>
+                <a:latin typeface="BIZ UDPゴシック"/>
+                <a:ea typeface="BIZ UDPゴシック"/>
+                <a:cs typeface="BIZ UDPゴシック"/>
               </a:rPr>
               <a:t>バスの到着予測の表示を見て「◯分までに来る確率」などを答える</a:t>
             </a:r>
@@ -15640,6 +16108,9 @@
                 <a:solidFill>
                   <a:srgbClr val="0B3C6E"/>
                 </a:solidFill>
+                <a:latin typeface="BIZ UDPゴシック"/>
+                <a:ea typeface="BIZ UDPゴシック"/>
+                <a:cs typeface="BIZ UDPゴシック"/>
               </a:rPr>
               <a:t>測ったもの</a:t>
             </a:r>
@@ -15679,6 +16150,9 @@
                 <a:solidFill>
                   <a:srgbClr val="24303F"/>
                 </a:solidFill>
+                <a:latin typeface="BIZ UDPゴシック"/>
+                <a:ea typeface="BIZ UDPゴシック"/>
+                <a:cs typeface="BIZ UDPゴシック"/>
               </a:rPr>
               <a:t>確率の推定のばらつき（正解からのずれの分散）と、答えへの自信</a:t>
             </a:r>
@@ -15836,6 +16310,9 @@
                 <a:solidFill>
                   <a:srgbClr val="0B3C6E"/>
                 </a:solidFill>
+                <a:latin typeface="BIZ UDPゴシック"/>
+                <a:ea typeface="BIZ UDPゴシック"/>
+                <a:cs typeface="BIZ UDPゴシック"/>
               </a:rPr>
               <a:t>参加者</a:t>
             </a:r>
@@ -15875,6 +16352,9 @@
                 <a:solidFill>
                   <a:srgbClr val="24303F"/>
                 </a:solidFill>
+                <a:latin typeface="BIZ UDPゴシック"/>
+                <a:ea typeface="BIZ UDPゴシック"/>
+                <a:cs typeface="BIZ UDPゴシック"/>
               </a:rPr>
               <a:t>オンラインで募集した参加者（人数と条件の割り当ては原著で確認）</a:t>
             </a:r>
@@ -15914,6 +16394,9 @@
                 <a:solidFill>
                   <a:srgbClr val="E8457C"/>
                 </a:solidFill>
+                <a:latin typeface="BIZ UDPゴシック"/>
+                <a:ea typeface="BIZ UDPゴシック"/>
+                <a:cs typeface="BIZ UDPゴシック"/>
               </a:rPr>
               <a:t>※ 条件の数・参加者数・統計値は、発表前に原著の Experiment の節で確認して差し替えること</a:t>
             </a:r>
@@ -15966,6 +16449,9 @@
                 <a:solidFill>
                   <a:srgbClr val="24303F"/>
                 </a:solidFill>
+                <a:latin typeface="BIZ UDPゴシック"/>
+                <a:ea typeface="BIZ UDPゴシック"/>
+                <a:cs typeface="BIZ UDPゴシック"/>
               </a:rPr>
               <a:t>主な結果</a:t>
             </a:r>
@@ -15984,9 +16470,14 @@
         </p:nvSpPr>
         <p:spPr/>
         <p:txBody>
-          <a:bodyPr/>
-          <a:p>
-            <a:r>
+          <a:bodyPr lIns="27432" rIns="0" wrap="none"/>
+          <a:p>
+            <a:r>
+              <a:rPr sz="900">
+                <a:latin typeface="BIZ UDPゴシック"/>
+                <a:ea typeface="BIZ UDPゴシック"/>
+                <a:cs typeface="BIZ UDPゴシック"/>
+              </a:rPr>
               <a:t>2026/11/13</a:t>
             </a:r>
           </a:p>
@@ -16007,7 +16498,11 @@
           <a:bodyPr/>
           <a:p>
             <a:fld id="{B6F15528-21DE-4FAA-801E-634DDDAF4B2B}" type="slidenum">
-              <a:rPr lang="en-US"/>
+              <a:rPr lang="en-US">
+                <a:latin typeface="BIZ UDPゴシック"/>
+                <a:ea typeface="BIZ UDPゴシック"/>
+                <a:cs typeface="BIZ UDPゴシック"/>
+              </a:rPr>
               <a:t>7</a:t>
             </a:fld>
           </a:p>
@@ -16090,6 +16585,9 @@
                 <a:solidFill>
                   <a:srgbClr val="12A38A"/>
                 </a:solidFill>
+                <a:latin typeface="BIZ UDPゴシック"/>
+                <a:ea typeface="BIZ UDPゴシック"/>
+                <a:cs typeface="BIZ UDPゴシック"/>
               </a:rPr>
               <a:t>約1.15倍</a:t>
             </a:r>
@@ -16106,6 +16604,9 @@
                 <a:solidFill>
                   <a:srgbClr val="24303F"/>
                 </a:solidFill>
+                <a:latin typeface="BIZ UDPゴシック"/>
+                <a:ea typeface="BIZ UDPゴシック"/>
+                <a:cs typeface="BIZ UDPゴシック"/>
               </a:rPr>
               <a:t>密度の図と比べて、quantile dotplot は確率の推定の分散を約1.15分の1に（約13%小さい）</a:t>
             </a:r>
@@ -16189,6 +16690,9 @@
                 <a:solidFill>
                   <a:srgbClr val="0B3C6E"/>
                 </a:solidFill>
+                <a:latin typeface="BIZ UDPゴシック"/>
+                <a:ea typeface="BIZ UDPゴシック"/>
+                <a:cs typeface="BIZ UDPゴシック"/>
               </a:rPr>
               <a:t>より自信をもって</a:t>
             </a:r>
@@ -16205,6 +16709,9 @@
                 <a:solidFill>
                   <a:srgbClr val="24303F"/>
                 </a:solidFill>
+                <a:latin typeface="BIZ UDPゴシック"/>
+                <a:ea typeface="BIZ UDPゴシック"/>
+                <a:cs typeface="BIZ UDPゴシック"/>
               </a:rPr>
               <a:t>点を数えて答えられるため、利用者は推定に自信をもちやすかった</a:t>
             </a:r>
@@ -16362,6 +16869,9 @@
                 <a:solidFill>
                   <a:srgbClr val="0B3C6E"/>
                 </a:solidFill>
+                <a:latin typeface="BIZ UDPゴシック"/>
+                <a:ea typeface="BIZ UDPゴシック"/>
+                <a:cs typeface="BIZ UDPゴシック"/>
               </a:rPr>
               <a:t>後続研究：判断の質も上がるか（Fernandes et al., CHI 2018）</a:t>
             </a:r>
@@ -16397,7 +16907,7 @@
               <a:buClr>
                 <a:srgbClr val="0099FF"/>
               </a:buClr>
-              <a:buFont typeface="Arial"/>
+              <a:buFont typeface="BIZ UDPゴシック"/>
               <a:buChar char="•"/>
             </a:pPr>
             <a:r>
@@ -16405,6 +16915,9 @@
                 <a:solidFill>
                   <a:srgbClr val="24303F"/>
                 </a:solidFill>
+                <a:latin typeface="BIZ UDPゴシック"/>
+                <a:ea typeface="BIZ UDPゴシック"/>
+                <a:cs typeface="BIZ UDPゴシック"/>
               </a:rPr>
               <a:t>バスに間に合うかを判断するゲーム形式の実験で、quantile dotplot や累積分布の表示が、文章だけの表示や不確かさなしの表示より良い判断につながった</a:t>
             </a:r>
@@ -16417,7 +16930,7 @@
               <a:buClr>
                 <a:srgbClr val="E8457C"/>
               </a:buClr>
-              <a:buFont typeface="Arial"/>
+              <a:buFont typeface="BIZ UDPゴシック"/>
               <a:buChar char="•"/>
             </a:pPr>
             <a:r>
@@ -16425,6 +16938,9 @@
                 <a:solidFill>
                   <a:srgbClr val="24303F"/>
                 </a:solidFill>
+                <a:latin typeface="BIZ UDPゴシック"/>
+                <a:ea typeface="BIZ UDPゴシック"/>
+                <a:cs typeface="BIZ UDPゴシック"/>
               </a:rPr>
               <a:t>→ 「読み取りやすい」だけでなく「行動の判断」にも効く可能性</a:t>
             </a:r>
@@ -16477,6 +16993,9 @@
                 <a:solidFill>
                   <a:srgbClr val="24303F"/>
                 </a:solidFill>
+                <a:latin typeface="BIZ UDPゴシック"/>
+                <a:ea typeface="BIZ UDPゴシック"/>
+                <a:cs typeface="BIZ UDPゴシック"/>
               </a:rPr>
               <a:t>批判的に読む：限界と疑問</a:t>
             </a:r>
@@ -16495,9 +17014,14 @@
         </p:nvSpPr>
         <p:spPr/>
         <p:txBody>
-          <a:bodyPr/>
-          <a:p>
-            <a:r>
+          <a:bodyPr lIns="27432" rIns="0" wrap="none"/>
+          <a:p>
+            <a:r>
+              <a:rPr sz="900">
+                <a:latin typeface="BIZ UDPゴシック"/>
+                <a:ea typeface="BIZ UDPゴシック"/>
+                <a:cs typeface="BIZ UDPゴシック"/>
+              </a:rPr>
               <a:t>2026/11/13</a:t>
             </a:r>
           </a:p>
@@ -16518,7 +17042,11 @@
           <a:bodyPr/>
           <a:p>
             <a:fld id="{B6F15528-21DE-4FAA-801E-634DDDAF4B2B}" type="slidenum">
-              <a:rPr lang="en-US"/>
+              <a:rPr lang="en-US">
+                <a:latin typeface="BIZ UDPゴシック"/>
+                <a:ea typeface="BIZ UDPゴシック"/>
+                <a:cs typeface="BIZ UDPゴシック"/>
+              </a:rPr>
               <a:t>8</a:t>
             </a:fld>
           </a:p>
@@ -16675,6 +17203,9 @@
                 <a:solidFill>
                   <a:srgbClr val="0B3C6E"/>
                 </a:solidFill>
+                <a:latin typeface="BIZ UDPゴシック"/>
+                <a:ea typeface="BIZ UDPゴシック"/>
+                <a:cs typeface="BIZ UDPゴシック"/>
               </a:rPr>
               <a:t>シナリオ上の推定課題</a:t>
             </a:r>
@@ -16714,6 +17245,9 @@
                 <a:solidFill>
                   <a:srgbClr val="24303F"/>
                 </a:solidFill>
+                <a:latin typeface="BIZ UDPゴシック"/>
+                <a:ea typeface="BIZ UDPゴシック"/>
+                <a:cs typeface="BIZ UDPゴシック"/>
               </a:rPr>
               <a:t>実際の乗車の判断ではない（2018年の後続研究で一部補われた）</a:t>
             </a:r>
@@ -16871,6 +17405,9 @@
                 <a:solidFill>
                   <a:srgbClr val="0B3C6E"/>
                 </a:solidFill>
+                <a:latin typeface="BIZ UDPゴシック"/>
+                <a:ea typeface="BIZ UDPゴシック"/>
+                <a:cs typeface="BIZ UDPゴシック"/>
               </a:rPr>
               <a:t>効果量は小さめ</a:t>
             </a:r>
@@ -16910,6 +17447,9 @@
                 <a:solidFill>
                   <a:srgbClr val="24303F"/>
                 </a:solidFill>
+                <a:latin typeface="BIZ UDPゴシック"/>
+                <a:ea typeface="BIZ UDPゴシック"/>
+                <a:cs typeface="BIZ UDPゴシック"/>
               </a:rPr>
               <a:t>分散で約1.15倍。実際の使い勝手でどれほど差が出るか</a:t>
             </a:r>
@@ -17067,6 +17607,9 @@
                 <a:solidFill>
                   <a:srgbClr val="0B3C6E"/>
                 </a:solidFill>
+                <a:latin typeface="BIZ UDPゴシック"/>
+                <a:ea typeface="BIZ UDPゴシック"/>
+                <a:cs typeface="BIZ UDPゴシック"/>
               </a:rPr>
               <a:t>予測の更新は扱っていない</a:t>
             </a:r>
@@ -17106,6 +17649,9 @@
                 <a:solidFill>
                   <a:srgbClr val="24303F"/>
                 </a:solidFill>
+                <a:latin typeface="BIZ UDPゴシック"/>
+                <a:ea typeface="BIZ UDPゴシック"/>
+                <a:cs typeface="BIZ UDPゴシック"/>
               </a:rPr>
               <a:t>時間とともに予測が変わる場面での見え方は未検討</a:t>
             </a:r>
@@ -17263,6 +17809,9 @@
                 <a:solidFill>
                   <a:srgbClr val="0B3C6E"/>
                 </a:solidFill>
+                <a:latin typeface="BIZ UDPゴシック"/>
+                <a:ea typeface="BIZ UDPゴシック"/>
+                <a:cs typeface="BIZ UDPゴシック"/>
               </a:rPr>
               <a:t>客観的な予測が対象</a:t>
             </a:r>
@@ -17302,6 +17851,9 @@
                 <a:solidFill>
                   <a:srgbClr val="24303F"/>
                 </a:solidFill>
+                <a:latin typeface="BIZ UDPゴシック"/>
+                <a:ea typeface="BIZ UDPゴシック"/>
+                <a:cs typeface="BIZ UDPゴシック"/>
               </a:rPr>
               <a:t>気分や疲れのような主観的な予測に当てはまるかは不明</a:t>
             </a:r>
@@ -17385,6 +17937,9 @@
                 <a:solidFill>
                   <a:srgbClr val="0B3C6E"/>
                 </a:solidFill>
+                <a:latin typeface="BIZ UDPゴシック"/>
+                <a:ea typeface="BIZ UDPゴシック"/>
+                <a:cs typeface="BIZ UDPゴシック"/>
               </a:rPr>
               <a:t>→ OshiFit は「主観的な予測 × 毎週の更新 × 実際の行動」で、この論文の外側を検証できる</a:t>
             </a:r>
@@ -17401,6 +17956,9 @@
                 <a:solidFill>
                   <a:srgbClr val="24303F"/>
                 </a:solidFill>
+                <a:latin typeface="BIZ UDPゴシック"/>
+                <a:ea typeface="BIZ UDPゴシック"/>
+                <a:cs typeface="BIZ UDPゴシック"/>
               </a:rPr>
               <a:t>ただし、ドット表示とアバター表示の効果は本実験では切り分けられない（群Cは両方を見る）</a:t>
             </a:r>
@@ -17453,6 +18011,9 @@
                 <a:solidFill>
                   <a:srgbClr val="24303F"/>
                 </a:solidFill>
+                <a:latin typeface="BIZ UDPゴシック"/>
+                <a:ea typeface="BIZ UDPゴシック"/>
+                <a:cs typeface="BIZ UDPゴシック"/>
               </a:rPr>
               <a:t>OshiFit への対応づけ</a:t>
             </a:r>
@@ -17471,9 +18032,14 @@
         </p:nvSpPr>
         <p:spPr/>
         <p:txBody>
-          <a:bodyPr/>
-          <a:p>
-            <a:r>
+          <a:bodyPr lIns="27432" rIns="0" wrap="none"/>
+          <a:p>
+            <a:r>
+              <a:rPr sz="900">
+                <a:latin typeface="BIZ UDPゴシック"/>
+                <a:ea typeface="BIZ UDPゴシック"/>
+                <a:cs typeface="BIZ UDPゴシック"/>
+              </a:rPr>
               <a:t>2026/11/13</a:t>
             </a:r>
           </a:p>
@@ -17494,7 +18060,11 @@
           <a:bodyPr/>
           <a:p>
             <a:fld id="{B6F15528-21DE-4FAA-801E-634DDDAF4B2B}" type="slidenum">
-              <a:rPr lang="en-US"/>
+              <a:rPr lang="en-US">
+                <a:latin typeface="BIZ UDPゴシック"/>
+                <a:ea typeface="BIZ UDPゴシック"/>
+                <a:cs typeface="BIZ UDPゴシック"/>
+              </a:rPr>
               <a:t>9</a:t>
             </a:fld>
           </a:p>
@@ -17542,6 +18112,9 @@
                           <a:solidFill>
                             <a:srgbClr val="FFFFFF"/>
                           </a:solidFill>
+                          <a:latin typeface="BIZ UDPゴシック"/>
+                          <a:ea typeface="BIZ UDPゴシック"/>
+                          <a:cs typeface="BIZ UDPゴシック"/>
                         </a:rPr>
                         <a:t>観点</a:t>
                       </a:r>
@@ -17591,6 +18164,9 @@
                           <a:solidFill>
                             <a:srgbClr val="FFFFFF"/>
                           </a:solidFill>
+                          <a:latin typeface="BIZ UDPゴシック"/>
+                          <a:ea typeface="BIZ UDPゴシック"/>
+                          <a:cs typeface="BIZ UDPゴシック"/>
                         </a:rPr>
                         <a:t>Kay et al. (2016)</a:t>
                       </a:r>
@@ -17640,6 +18216,9 @@
                           <a:solidFill>
                             <a:srgbClr val="FFFFFF"/>
                           </a:solidFill>
+                          <a:latin typeface="BIZ UDPゴシック"/>
+                          <a:ea typeface="BIZ UDPゴシック"/>
+                          <a:cs typeface="BIZ UDPゴシック"/>
                         </a:rPr>
                         <a:t>OshiFit</a:t>
                       </a:r>
@@ -17691,6 +18270,9 @@
                           <a:solidFill>
                             <a:srgbClr val="24303F"/>
                           </a:solidFill>
+                          <a:latin typeface="BIZ UDPゴシック"/>
+                          <a:ea typeface="BIZ UDPゴシック"/>
+                          <a:cs typeface="BIZ UDPゴシック"/>
                         </a:rPr>
                         <a:t>予測するもの</a:t>
                       </a:r>
@@ -17740,6 +18322,9 @@
                           <a:solidFill>
                             <a:srgbClr val="24303F"/>
                           </a:solidFill>
+                          <a:latin typeface="BIZ UDPゴシック"/>
+                          <a:ea typeface="BIZ UDPゴシック"/>
+                          <a:cs typeface="BIZ UDPゴシック"/>
                         </a:rPr>
                         <a:t>バスの到着時刻</a:t>
                       </a:r>
@@ -17789,6 +18374,9 @@
                           <a:solidFill>
                             <a:srgbClr val="24303F"/>
                           </a:solidFill>
+                          <a:latin typeface="BIZ UDPゴシック"/>
+                          <a:ea typeface="BIZ UDPゴシック"/>
+                          <a:cs typeface="BIZ UDPゴシック"/>
                         </a:rPr>
                         <a:t>6週間後の推し疲れ・充実</a:t>
                       </a:r>
@@ -17840,6 +18428,9 @@
                           <a:solidFill>
                             <a:srgbClr val="24303F"/>
                           </a:solidFill>
+                          <a:latin typeface="BIZ UDPゴシック"/>
+                          <a:ea typeface="BIZ UDPゴシック"/>
+                          <a:cs typeface="BIZ UDPゴシック"/>
                         </a:rPr>
                         <a:t>利用者の判断</a:t>
                       </a:r>
@@ -17889,6 +18480,9 @@
                           <a:solidFill>
                             <a:srgbClr val="24303F"/>
                           </a:solidFill>
+                          <a:latin typeface="BIZ UDPゴシック"/>
+                          <a:ea typeface="BIZ UDPゴシック"/>
+                          <a:cs typeface="BIZ UDPゴシック"/>
                         </a:rPr>
                         <a:t>走るべきか・いつ家を出るか</a:t>
                       </a:r>
@@ -17938,6 +18532,9 @@
                           <a:solidFill>
                             <a:srgbClr val="24303F"/>
                           </a:solidFill>
+                          <a:latin typeface="BIZ UDPゴシック"/>
+                          <a:ea typeface="BIZ UDPゴシック"/>
+                          <a:cs typeface="BIZ UDPゴシック"/>
                         </a:rPr>
                         <a:t>提案を試すか・どれを選ぶか</a:t>
                       </a:r>
@@ -17989,6 +18586,9 @@
                           <a:solidFill>
                             <a:srgbClr val="24303F"/>
                           </a:solidFill>
+                          <a:latin typeface="BIZ UDPゴシック"/>
+                          <a:ea typeface="BIZ UDPゴシック"/>
+                          <a:cs typeface="BIZ UDPゴシック"/>
                         </a:rPr>
                         <a:t>判断の境目</a:t>
                       </a:r>
@@ -18038,6 +18638,9 @@
                           <a:solidFill>
                             <a:srgbClr val="24303F"/>
                           </a:solidFill>
+                          <a:latin typeface="BIZ UDPゴシック"/>
+                          <a:ea typeface="BIZ UDPゴシック"/>
+                          <a:cs typeface="BIZ UDPゴシック"/>
                         </a:rPr>
                         <a:t>◯分までに来るか</a:t>
                       </a:r>
@@ -18087,6 +18690,9 @@
                           <a:solidFill>
                             <a:srgbClr val="24303F"/>
                           </a:solidFill>
+                          <a:latin typeface="BIZ UDPゴシック"/>
+                          <a:ea typeface="BIZ UDPゴシック"/>
+                          <a:cs typeface="BIZ UDPゴシック"/>
                         </a:rPr>
                         <a:t>「疲れ高め」（3.5以上）になるか</a:t>
                       </a:r>
@@ -18138,6 +18744,9 @@
                           <a:solidFill>
                             <a:srgbClr val="24303F"/>
                           </a:solidFill>
+                          <a:latin typeface="BIZ UDPゴシック"/>
+                          <a:ea typeface="BIZ UDPゴシック"/>
+                          <a:cs typeface="BIZ UDPゴシック"/>
                         </a:rPr>
                         <a:t>表示</a:t>
                       </a:r>
@@ -18187,6 +18796,9 @@
                           <a:solidFill>
                             <a:srgbClr val="24303F"/>
                           </a:solidFill>
+                          <a:latin typeface="BIZ UDPゴシック"/>
+                          <a:ea typeface="BIZ UDPゴシック"/>
+                          <a:cs typeface="BIZ UDPゴシック"/>
                         </a:rPr>
                         <a:t>20個の点（1点＝5%）</a:t>
                       </a:r>
@@ -18236,6 +18848,9 @@
                           <a:solidFill>
                             <a:srgbClr val="24303F"/>
                           </a:solidFill>
+                          <a:latin typeface="BIZ UDPゴシック"/>
+                          <a:ea typeface="BIZ UDPゴシック"/>
+                          <a:cs typeface="BIZ UDPゴシック"/>
                         </a:rPr>
                         <a:t>「20人中◯人のあなた」の点＋重なったアバター</a:t>
                       </a:r>
@@ -18287,6 +18902,9 @@
                           <a:solidFill>
                             <a:srgbClr val="24303F"/>
                           </a:solidFill>
+                          <a:latin typeface="BIZ UDPゴシック"/>
+                          <a:ea typeface="BIZ UDPゴシック"/>
+                          <a:cs typeface="BIZ UDPゴシック"/>
                         </a:rPr>
                         <a:t>更新</a:t>
                       </a:r>
@@ -18336,6 +18954,9 @@
                           <a:solidFill>
                             <a:srgbClr val="24303F"/>
                           </a:solidFill>
+                          <a:latin typeface="BIZ UDPゴシック"/>
+                          <a:ea typeface="BIZ UDPゴシック"/>
+                          <a:cs typeface="BIZ UDPゴシック"/>
                         </a:rPr>
                         <a:t>（扱わない）</a:t>
                       </a:r>
@@ -18385,6 +19006,9 @@
                           <a:solidFill>
                             <a:srgbClr val="24303F"/>
                           </a:solidFill>
+                          <a:latin typeface="BIZ UDPゴシック"/>
+                          <a:ea typeface="BIZ UDPゴシック"/>
+                          <a:cs typeface="BIZ UDPゴシック"/>
                         </a:rPr>
                         <a:t>毎晩更新・毎週の答え合わせ</a:t>
                       </a:r>
@@ -18498,6 +19122,9 @@
                 <a:solidFill>
                   <a:srgbClr val="FFFFFF"/>
                 </a:solidFill>
+                <a:latin typeface="BIZ UDPゴシック"/>
+                <a:ea typeface="BIZ UDPゴシック"/>
+                <a:cs typeface="BIZ UDPゴシック"/>
               </a:rPr>
               <a:t>進捗②で追加した「20人中◯人」の点表示は、この論文の quantile dotplot と同じ考え方</a:t>
             </a:r>
@@ -18514,6 +19141,9 @@
                 <a:solidFill>
                   <a:srgbClr val="CCE9FF"/>
                 </a:solidFill>
+                <a:latin typeface="BIZ UDPゴシック"/>
+                <a:ea typeface="BIZ UDPゴシック"/>
+                <a:cs typeface="BIZ UDPゴシック"/>
               </a:rPr>
               <a:t>点の数（20）と、アバターの重なり（5体）の意味をそろえるとさらに読みやすくなるはず</a:t>
             </a:r>
@@ -18571,12 +19201,12 @@
     </a:clrScheme>
     <a:fontScheme name="mixlab">
       <a:majorFont>
-        <a:latin typeface="Arial"/>
+        <a:latin typeface="BIZ UDPゴシック"/>
         <a:ea typeface="BIZ UDPゴシック"/>
         <a:cs typeface=""/>
       </a:majorFont>
       <a:minorFont>
-        <a:latin typeface="Arial"/>
+        <a:latin typeface="BIZ UDPゴシック"/>
         <a:ea typeface="BIZ UDPゴシック"/>
         <a:cs typeface=""/>
       </a:minorFont>
@@ -18772,7 +19402,7 @@
     </a:clrScheme>
     <a:fontScheme name="Office">
       <a:majorFont>
-        <a:latin typeface="游ゴシック Light" panose="020F0302020204030204"/>
+        <a:latin typeface="BIZ UDPゴシック"/>
         <a:ea typeface=""/>
         <a:cs typeface=""/>
         <a:font script="Jpan" typeface="游ゴシック Light"/>
@@ -18807,7 +19437,7 @@
         <a:font script="Geor" typeface="Sylfaen"/>
       </a:majorFont>
       <a:minorFont>
-        <a:latin typeface="游ゴシック" panose="020F0502020204030204"/>
+        <a:latin typeface="BIZ UDPゴシック"/>
         <a:ea typeface=""/>
         <a:cs typeface=""/>
         <a:font script="Jpan" typeface="游ゴシック"/>
